--- a/dist/초3/수학/자연수계산/초3_수학_자연수계산_06_세자리수×한자리수.pptx
+++ b/dist/초3/수학/자연수계산/초3_수학_자연수계산_06_세자리수×한자리수.pptx
@@ -120,13 +120,13 @@
   <p:extLst>
     <p:ext uri="{521415D9-36F7-43E2-AB2F-B90AF26B5E84}">
       <p14:sectionLst xmlns:p14="http://schemas.microsoft.com/office/powerpoint/2010/main">
-        <p14:section name="도입" id="{49c8332b-8fe4-ca96-8678-8bd3d826d994}">
+        <p14:section name="도입" id="{ce45f324-ecd4-a9ed-bad8-650ac84eb210}">
           <p14:sldIdLst>
             <p14:sldId id="256"/>
             <p14:sldId id="257"/>
           </p14:sldIdLst>
         </p14:section>
-        <p14:section name="개념" id="{0b529c91-7661-114d-7c0a-41a7ad1b6771}">
+        <p14:section name="개념" id="{952f9a09-e6be-0a6e-8737-410f262a4bcb}">
           <p14:sldIdLst>
             <p14:sldId id="258"/>
             <p14:sldId id="259"/>
@@ -134,32 +134,32 @@
             <p14:sldId id="262"/>
           </p14:sldIdLst>
         </p14:section>
-        <p14:section name="연습" id="{1a9d534d-b841-5ac7-98f8-e085bca2db57}">
+        <p14:section name="연습" id="{a22291c7-1cea-8372-2bb6-ea07f1548b56}">
           <p14:sldIdLst>
             <p14:sldId id="261"/>
             <p14:sldId id="263"/>
             <p14:sldId id="264"/>
           </p14:sldIdLst>
         </p14:section>
-        <p14:section name="개념" id="{d0d26767-da03-8a6f-c107-9fc4d1fe2af8}">
+        <p14:section name="개념" id="{95354929-fb48-989a-53c7-856da18682fa}">
           <p14:sldIdLst/>
         </p14:section>
-        <p14:section name="연습" id="{5673cf19-8e84-7433-ed2c-e2da73c80e57}">
+        <p14:section name="연습" id="{30b2e728-ebda-00a8-4b47-0132edc59a81}">
           <p14:sldIdLst/>
         </p14:section>
-        <p14:section name="확인" id="{66de038b-a30e-6664-8c0c-b1daa10e9ff9}">
+        <p14:section name="확인" id="{c2a04798-b4ff-1bac-4b1d-c982755d546b}">
           <p14:sldIdLst>
             <p14:sldId id="265"/>
             <p14:sldId id="266"/>
             <p14:sldId id="267"/>
           </p14:sldIdLst>
         </p14:section>
-        <p14:section name="정리" id="{25de8df4-a0f4-3b08-2be6-72c5f75d0a14}">
+        <p14:section name="정리" id="{0c02377f-4519-f806-4d8f-1b49c770c7af}">
           <p14:sldIdLst>
             <p14:sldId id="268"/>
           </p14:sldIdLst>
         </p14:section>
-        <p14:section name="보충" id="{2c5aa4d1-b7bd-0174-d21c-0ab2d386e2fd}">
+        <p14:section name="보충" id="{816234d5-3da4-c7b0-2d20-dd08f0e06bf6}">
           <p14:sldIdLst>
             <p14:sldId id="269"/>
           </p14:sldIdLst>
@@ -3034,7 +3034,7 @@
           </p:nvPr>
         </p:nvGraphicFramePr>
         <p:xfrm>
-          <a:off x="7726680" y="965200"/>
+          <a:off x="7726680" y="1000760"/>
           <a:ext cx="3840480" cy="914400"/>
         </p:xfrm>
         <a:graphic>
@@ -3047,7 +3047,7 @@
                 <a:gridCol w="960120"/>
                 <a:gridCol w="960120"/>
               </a:tblGrid>
-              <a:tr h="568960">
+              <a:tr h="551180">
                 <a:tc>
                   <a:txBody>
                     <a:bodyPr/>
@@ -3310,7 +3310,7 @@
                   </a:tcPr>
                 </a:tc>
               </a:tr>
-              <a:tr h="568960">
+              <a:tr h="551180">
                 <a:tc>
                   <a:txBody>
                     <a:bodyPr/>
@@ -3573,7 +3573,7 @@
                   </a:tcPr>
                 </a:tc>
               </a:tr>
-              <a:tr h="568960">
+              <a:tr h="551180">
                 <a:tc>
                   <a:txBody>
                     <a:bodyPr/>
@@ -3825,7 +3825,7 @@
                   </a:tcPr>
                 </a:tc>
               </a:tr>
-              <a:tr h="568960">
+              <a:tr h="551180">
                 <a:tc>
                   <a:txBody>
                     <a:bodyPr/>
@@ -6686,7 +6686,7 @@
           </p:nvPr>
         </p:nvGraphicFramePr>
         <p:xfrm>
-          <a:off x="7483450" y="2042160"/>
+          <a:off x="7483450" y="2089785"/>
           <a:ext cx="4023360" cy="914400"/>
         </p:xfrm>
         <a:graphic>
@@ -6699,7 +6699,7 @@
                 <a:gridCol w="1005840"/>
                 <a:gridCol w="1005840"/>
               </a:tblGrid>
-              <a:tr h="609600">
+              <a:tr h="590550">
                 <a:tc>
                   <a:txBody>
                     <a:bodyPr/>
@@ -6962,7 +6962,7 @@
                   </a:tcPr>
                 </a:tc>
               </a:tr>
-              <a:tr h="609600">
+              <a:tr h="590550">
                 <a:tc>
                   <a:txBody>
                     <a:bodyPr/>
@@ -7203,7 +7203,7 @@
                   </a:tcPr>
                 </a:tc>
               </a:tr>
-              <a:tr h="609600">
+              <a:tr h="590550">
                 <a:tc>
                   <a:txBody>
                     <a:bodyPr/>
@@ -7455,7 +7455,7 @@
                   </a:tcPr>
                 </a:tc>
               </a:tr>
-              <a:tr h="609600">
+              <a:tr h="590550">
                 <a:tc>
                   <a:txBody>
                     <a:bodyPr/>
@@ -7707,7 +7707,7 @@
                   </a:tcPr>
                 </a:tc>
               </a:tr>
-              <a:tr h="609600">
+              <a:tr h="590550">
                 <a:tc>
                   <a:txBody>
                     <a:bodyPr/>
@@ -10446,7 +10446,7 @@
           </p:nvPr>
         </p:nvGraphicFramePr>
         <p:xfrm>
-          <a:off x="7590709" y="2265680"/>
+          <a:off x="7590709" y="2323465"/>
           <a:ext cx="4023360" cy="914400"/>
         </p:xfrm>
         <a:graphic>
@@ -10459,7 +10459,7 @@
                 <a:gridCol w="1005840"/>
                 <a:gridCol w="1005840"/>
               </a:tblGrid>
-              <a:tr h="528320">
+              <a:tr h="511810">
                 <a:tc>
                   <a:txBody>
                     <a:bodyPr/>
@@ -10722,7 +10722,7 @@
                   </a:tcPr>
                 </a:tc>
               </a:tr>
-              <a:tr h="528320">
+              <a:tr h="511810">
                 <a:tc>
                   <a:txBody>
                     <a:bodyPr/>
@@ -10985,7 +10985,7 @@
                   </a:tcPr>
                 </a:tc>
               </a:tr>
-              <a:tr h="528320">
+              <a:tr h="511810">
                 <a:tc>
                   <a:txBody>
                     <a:bodyPr/>
@@ -11237,7 +11237,7 @@
                   </a:tcPr>
                 </a:tc>
               </a:tr>
-              <a:tr h="528320">
+              <a:tr h="511810">
                 <a:tc>
                   <a:txBody>
                     <a:bodyPr/>
@@ -11489,7 +11489,7 @@
                   </a:tcPr>
                 </a:tc>
               </a:tr>
-              <a:tr h="528320">
+              <a:tr h="511810">
                 <a:tc>
                   <a:txBody>
                     <a:bodyPr/>
@@ -11741,7 +11741,7 @@
                   </a:tcPr>
                 </a:tc>
               </a:tr>
-              <a:tr h="528320">
+              <a:tr h="511810">
                 <a:tc>
                   <a:txBody>
                     <a:bodyPr/>
@@ -12004,7 +12004,7 @@
                   </a:tcPr>
                 </a:tc>
               </a:tr>
-              <a:tr h="528320">
+              <a:tr h="511810">
                 <a:tc>
                   <a:txBody>
                     <a:bodyPr/>
@@ -12844,7 +12844,7 @@
           </p:nvPr>
         </p:nvGraphicFramePr>
         <p:xfrm>
-          <a:off x="7483450" y="2042160"/>
+          <a:off x="7483450" y="2089785"/>
           <a:ext cx="4023360" cy="914400"/>
         </p:xfrm>
         <a:graphic>
@@ -12857,7 +12857,7 @@
                 <a:gridCol w="1005840"/>
                 <a:gridCol w="1005840"/>
               </a:tblGrid>
-              <a:tr h="609600">
+              <a:tr h="590550">
                 <a:tc>
                   <a:txBody>
                     <a:bodyPr/>
@@ -13120,7 +13120,7 @@
                   </a:tcPr>
                 </a:tc>
               </a:tr>
-              <a:tr h="609600">
+              <a:tr h="590550">
                 <a:tc>
                   <a:txBody>
                     <a:bodyPr/>
@@ -13361,7 +13361,7 @@
                   </a:tcPr>
                 </a:tc>
               </a:tr>
-              <a:tr h="609600">
+              <a:tr h="590550">
                 <a:tc>
                   <a:txBody>
                     <a:bodyPr/>
@@ -13624,7 +13624,7 @@
                   </a:tcPr>
                 </a:tc>
               </a:tr>
-              <a:tr h="609600">
+              <a:tr h="590550">
                 <a:tc>
                   <a:txBody>
                     <a:bodyPr/>
@@ -13876,7 +13876,7 @@
                   </a:tcPr>
                 </a:tc>
               </a:tr>
-              <a:tr h="609600">
+              <a:tr h="590550">
                 <a:tc>
                   <a:txBody>
                     <a:bodyPr/>
@@ -14679,7 +14679,7 @@
           </p:nvPr>
         </p:nvGraphicFramePr>
         <p:xfrm>
-          <a:off x="6947154" y="2153920"/>
+          <a:off x="6947154" y="2195195"/>
           <a:ext cx="4023360" cy="914400"/>
         </p:xfrm>
         <a:graphic>
@@ -14692,7 +14692,7 @@
                 <a:gridCol w="1005840"/>
                 <a:gridCol w="1005840"/>
               </a:tblGrid>
-              <a:tr h="528320">
+              <a:tr h="511810">
                 <a:tc>
                   <a:txBody>
                     <a:bodyPr/>
@@ -14955,7 +14955,7 @@
                   </a:tcPr>
                 </a:tc>
               </a:tr>
-              <a:tr h="528320">
+              <a:tr h="511810">
                 <a:tc>
                   <a:txBody>
                     <a:bodyPr/>
@@ -15207,7 +15207,7 @@
                   </a:tcPr>
                 </a:tc>
               </a:tr>
-              <a:tr h="528320">
+              <a:tr h="511810">
                 <a:tc>
                   <a:txBody>
                     <a:bodyPr/>
@@ -15470,7 +15470,7 @@
                   </a:tcPr>
                 </a:tc>
               </a:tr>
-              <a:tr h="528320">
+              <a:tr h="511810">
                 <a:tc>
                   <a:txBody>
                     <a:bodyPr/>
@@ -15722,7 +15722,7 @@
                   </a:tcPr>
                 </a:tc>
               </a:tr>
-              <a:tr h="528320">
+              <a:tr h="511810">
                 <a:tc>
                   <a:txBody>
                     <a:bodyPr/>
@@ -16484,7 +16484,7 @@
           </p:nvPr>
         </p:nvGraphicFramePr>
         <p:xfrm>
-          <a:off x="6920911" y="2042160"/>
+          <a:off x="6920911" y="2089785"/>
           <a:ext cx="4719401" cy="914400"/>
         </p:xfrm>
         <a:graphic>
@@ -16498,7 +16498,7 @@
                 <a:gridCol w="943880"/>
                 <a:gridCol w="943880"/>
               </a:tblGrid>
-              <a:tr h="609600">
+              <a:tr h="590550">
                 <a:tc>
                   <a:txBody>
                     <a:bodyPr/>
@@ -16829,7 +16829,7 @@
                   </a:tcPr>
                 </a:tc>
               </a:tr>
-              <a:tr h="609600">
+              <a:tr h="590550">
                 <a:tc>
                   <a:txBody>
                     <a:bodyPr/>
@@ -17138,7 +17138,7 @@
                   </a:tcPr>
                 </a:tc>
               </a:tr>
-              <a:tr h="609600">
+              <a:tr h="590550">
                 <a:tc>
                   <a:txBody>
                     <a:bodyPr/>
@@ -17458,7 +17458,7 @@
                   </a:tcPr>
                 </a:tc>
               </a:tr>
-              <a:tr h="609600">
+              <a:tr h="590550">
                 <a:tc>
                   <a:txBody>
                     <a:bodyPr/>
@@ -17767,7 +17767,7 @@
                   </a:tcPr>
                 </a:tc>
               </a:tr>
-              <a:tr h="609600">
+              <a:tr h="590550">
                 <a:tc>
                   <a:txBody>
                     <a:bodyPr/>
